--- a/Document/Slide thuyết trình.pptx
+++ b/Document/Slide thuyết trình.pptx
@@ -2668,7 +2668,7 @@
           </a:prstGeom>
           <a:extLst>
             <a:ext uri="{C572A759-6A51-4108-AA02-DFA0A04FC94B}">
-              <ma14:wrappingTextBoxFlag xmlns="" xmlns:ma14="http://schemas.microsoft.com/office/mac/drawingml/2011/main" val="0"/>
+              <ma14:wrappingTextBoxFlag xmlns:ma14="http://schemas.microsoft.com/office/mac/drawingml/2011/main" xmlns="" val="0"/>
             </a:ext>
           </a:extLst>
         </p:spPr>
@@ -2746,7 +2746,7 @@
           </a:prstGeom>
           <a:extLst>
             <a:ext uri="{C572A759-6A51-4108-AA02-DFA0A04FC94B}">
-              <ma14:wrappingTextBoxFlag xmlns="" xmlns:ma14="http://schemas.microsoft.com/office/mac/drawingml/2011/main" val="0"/>
+              <ma14:wrappingTextBoxFlag xmlns:ma14="http://schemas.microsoft.com/office/mac/drawingml/2011/main" xmlns="" val="0"/>
             </a:ext>
           </a:extLst>
         </p:spPr>
@@ -3840,7 +3840,7 @@
           </a:prstGeom>
           <a:extLst>
             <a:ext uri="{C572A759-6A51-4108-AA02-DFA0A04FC94B}">
-              <ma14:wrappingTextBoxFlag xmlns="" xmlns:ma14="http://schemas.microsoft.com/office/mac/drawingml/2011/main" val="0"/>
+              <ma14:wrappingTextBoxFlag xmlns:ma14="http://schemas.microsoft.com/office/mac/drawingml/2011/main" xmlns="" val="0"/>
             </a:ext>
           </a:extLst>
         </p:spPr>
@@ -5119,7 +5119,7 @@
           </a:prstGeom>
           <a:extLst>
             <a:ext uri="{C572A759-6A51-4108-AA02-DFA0A04FC94B}">
-              <ma14:wrappingTextBoxFlag xmlns="" xmlns:ma14="http://schemas.microsoft.com/office/mac/drawingml/2011/main" val="0"/>
+              <ma14:wrappingTextBoxFlag xmlns:ma14="http://schemas.microsoft.com/office/mac/drawingml/2011/main" xmlns="" val="0"/>
             </a:ext>
           </a:extLst>
         </p:spPr>
@@ -5403,7 +5403,7 @@
           </a:prstGeom>
           <a:extLst>
             <a:ext uri="{C572A759-6A51-4108-AA02-DFA0A04FC94B}">
-              <ma14:wrappingTextBoxFlag xmlns="" xmlns:ma14="http://schemas.microsoft.com/office/mac/drawingml/2011/main" val="0"/>
+              <ma14:wrappingTextBoxFlag xmlns:ma14="http://schemas.microsoft.com/office/mac/drawingml/2011/main" xmlns="" val="0"/>
             </a:ext>
           </a:extLst>
         </p:spPr>
@@ -5910,7 +5910,7 @@
           </a:prstGeom>
           <a:extLst>
             <a:ext uri="{C572A759-6A51-4108-AA02-DFA0A04FC94B}">
-              <ma14:wrappingTextBoxFlag xmlns="" xmlns:ma14="http://schemas.microsoft.com/office/mac/drawingml/2011/main" val="0"/>
+              <ma14:wrappingTextBoxFlag xmlns:ma14="http://schemas.microsoft.com/office/mac/drawingml/2011/main" xmlns="" val="0"/>
             </a:ext>
           </a:extLst>
         </p:spPr>
@@ -6295,7 +6295,7 @@
           </a:prstGeom>
           <a:extLst>
             <a:ext uri="{C572A759-6A51-4108-AA02-DFA0A04FC94B}">
-              <ma14:wrappingTextBoxFlag xmlns="" xmlns:ma14="http://schemas.microsoft.com/office/mac/drawingml/2011/main" val="0"/>
+              <ma14:wrappingTextBoxFlag xmlns:ma14="http://schemas.microsoft.com/office/mac/drawingml/2011/main" xmlns="" val="0"/>
             </a:ext>
           </a:extLst>
         </p:spPr>
@@ -6557,7 +6557,7 @@
           </a:prstGeom>
           <a:extLst>
             <a:ext uri="{C572A759-6A51-4108-AA02-DFA0A04FC94B}">
-              <ma14:wrappingTextBoxFlag xmlns="" xmlns:ma14="http://schemas.microsoft.com/office/mac/drawingml/2011/main" val="0"/>
+              <ma14:wrappingTextBoxFlag xmlns:ma14="http://schemas.microsoft.com/office/mac/drawingml/2011/main" xmlns="" val="0"/>
             </a:ext>
           </a:extLst>
         </p:spPr>
@@ -7837,7 +7837,7 @@
           </a:prstGeom>
           <a:extLst>
             <a:ext uri="{C572A759-6A51-4108-AA02-DFA0A04FC94B}">
-              <ma14:wrappingTextBoxFlag xmlns="" xmlns:ma14="http://schemas.microsoft.com/office/mac/drawingml/2011/main" val="0"/>
+              <ma14:wrappingTextBoxFlag xmlns:ma14="http://schemas.microsoft.com/office/mac/drawingml/2011/main" xmlns="" val="0"/>
             </a:ext>
           </a:extLst>
         </p:spPr>
@@ -8190,7 +8190,7 @@
           </a:prstGeom>
           <a:extLst>
             <a:ext uri="{C572A759-6A51-4108-AA02-DFA0A04FC94B}">
-              <ma14:wrappingTextBoxFlag xmlns="" xmlns:ma14="http://schemas.microsoft.com/office/mac/drawingml/2011/main" val="0"/>
+              <ma14:wrappingTextBoxFlag xmlns:ma14="http://schemas.microsoft.com/office/mac/drawingml/2011/main" xmlns="" val="0"/>
             </a:ext>
           </a:extLst>
         </p:spPr>
@@ -8520,7 +8520,7 @@
           </a:prstGeom>
           <a:extLst>
             <a:ext uri="{C572A759-6A51-4108-AA02-DFA0A04FC94B}">
-              <ma14:wrappingTextBoxFlag xmlns="" xmlns:ma14="http://schemas.microsoft.com/office/mac/drawingml/2011/main" val="0"/>
+              <ma14:wrappingTextBoxFlag xmlns:ma14="http://schemas.microsoft.com/office/mac/drawingml/2011/main" xmlns="" val="0"/>
             </a:ext>
           </a:extLst>
         </p:spPr>
@@ -9142,7 +9142,7 @@
           </a:prstGeom>
           <a:extLst>
             <a:ext uri="{C572A759-6A51-4108-AA02-DFA0A04FC94B}">
-              <ma14:wrappingTextBoxFlag xmlns="" xmlns:ma14="http://schemas.microsoft.com/office/mac/drawingml/2011/main" val="0"/>
+              <ma14:wrappingTextBoxFlag xmlns:ma14="http://schemas.microsoft.com/office/mac/drawingml/2011/main" xmlns="" val="0"/>
             </a:ext>
           </a:extLst>
         </p:spPr>
@@ -9517,7 +9517,7 @@
           </a:prstGeom>
           <a:extLst>
             <a:ext uri="{C572A759-6A51-4108-AA02-DFA0A04FC94B}">
-              <ma14:wrappingTextBoxFlag xmlns="" xmlns:ma14="http://schemas.microsoft.com/office/mac/drawingml/2011/main" val="0"/>
+              <ma14:wrappingTextBoxFlag xmlns:ma14="http://schemas.microsoft.com/office/mac/drawingml/2011/main" xmlns="" val="0"/>
             </a:ext>
           </a:extLst>
         </p:spPr>
@@ -9829,7 +9829,7 @@
           </a:prstGeom>
           <a:extLst>
             <a:ext uri="{C572A759-6A51-4108-AA02-DFA0A04FC94B}">
-              <ma14:wrappingTextBoxFlag xmlns="" xmlns:ma14="http://schemas.microsoft.com/office/mac/drawingml/2011/main" val="0"/>
+              <ma14:wrappingTextBoxFlag xmlns:ma14="http://schemas.microsoft.com/office/mac/drawingml/2011/main" xmlns="" val="0"/>
             </a:ext>
           </a:extLst>
         </p:spPr>
@@ -10232,7 +10232,7 @@
           </a:prstGeom>
           <a:extLst>
             <a:ext uri="{C572A759-6A51-4108-AA02-DFA0A04FC94B}">
-              <ma14:wrappingTextBoxFlag xmlns="" xmlns:ma14="http://schemas.microsoft.com/office/mac/drawingml/2011/main" val="0"/>
+              <ma14:wrappingTextBoxFlag xmlns:ma14="http://schemas.microsoft.com/office/mac/drawingml/2011/main" xmlns="" val="0"/>
             </a:ext>
           </a:extLst>
         </p:spPr>
@@ -11644,7 +11644,7 @@
           </a:prstGeom>
           <a:extLst>
             <a:ext uri="{C572A759-6A51-4108-AA02-DFA0A04FC94B}">
-              <ma14:wrappingTextBoxFlag xmlns="" xmlns:ma14="http://schemas.microsoft.com/office/mac/drawingml/2011/main" val="0"/>
+              <ma14:wrappingTextBoxFlag xmlns:ma14="http://schemas.microsoft.com/office/mac/drawingml/2011/main" xmlns="" val="0"/>
             </a:ext>
           </a:extLst>
         </p:spPr>
@@ -12036,7 +12036,7 @@
           </a:prstGeom>
           <a:extLst>
             <a:ext uri="{C572A759-6A51-4108-AA02-DFA0A04FC94B}">
-              <ma14:wrappingTextBoxFlag xmlns="" xmlns:ma14="http://schemas.microsoft.com/office/mac/drawingml/2011/main" val="0"/>
+              <ma14:wrappingTextBoxFlag xmlns:ma14="http://schemas.microsoft.com/office/mac/drawingml/2011/main" xmlns="" val="0"/>
             </a:ext>
           </a:extLst>
         </p:spPr>
@@ -12477,7 +12477,7 @@
           </a:prstGeom>
           <a:extLst>
             <a:ext uri="{C572A759-6A51-4108-AA02-DFA0A04FC94B}">
-              <ma14:wrappingTextBoxFlag xmlns="" xmlns:ma14="http://schemas.microsoft.com/office/mac/drawingml/2011/main" val="0"/>
+              <ma14:wrappingTextBoxFlag xmlns:ma14="http://schemas.microsoft.com/office/mac/drawingml/2011/main" xmlns="" val="0"/>
             </a:ext>
           </a:extLst>
         </p:spPr>
@@ -12716,7 +12716,7 @@
           </a:prstGeom>
           <a:extLst>
             <a:ext uri="{C572A759-6A51-4108-AA02-DFA0A04FC94B}">
-              <ma14:wrappingTextBoxFlag xmlns="" xmlns:ma14="http://schemas.microsoft.com/office/mac/drawingml/2011/main" val="0"/>
+              <ma14:wrappingTextBoxFlag xmlns:ma14="http://schemas.microsoft.com/office/mac/drawingml/2011/main" xmlns="" val="0"/>
             </a:ext>
           </a:extLst>
         </p:spPr>
@@ -12867,7 +12867,7 @@
           </a:prstGeom>
           <a:extLst>
             <a:ext uri="{C572A759-6A51-4108-AA02-DFA0A04FC94B}">
-              <ma14:wrappingTextBoxFlag xmlns="" xmlns:ma14="http://schemas.microsoft.com/office/mac/drawingml/2011/main" val="0"/>
+              <ma14:wrappingTextBoxFlag xmlns:ma14="http://schemas.microsoft.com/office/mac/drawingml/2011/main" xmlns="" val="0"/>
             </a:ext>
           </a:extLst>
         </p:spPr>
@@ -13161,7 +13161,7 @@
           </a:prstGeom>
           <a:extLst>
             <a:ext uri="{C572A759-6A51-4108-AA02-DFA0A04FC94B}">
-              <ma14:wrappingTextBoxFlag xmlns="" xmlns:ma14="http://schemas.microsoft.com/office/mac/drawingml/2011/main" val="0"/>
+              <ma14:wrappingTextBoxFlag xmlns:ma14="http://schemas.microsoft.com/office/mac/drawingml/2011/main" xmlns="" val="0"/>
             </a:ext>
           </a:extLst>
         </p:spPr>
@@ -13658,7 +13658,7 @@
           </a:prstGeom>
           <a:extLst>
             <a:ext uri="{C572A759-6A51-4108-AA02-DFA0A04FC94B}">
-              <ma14:wrappingTextBoxFlag xmlns="" xmlns:ma14="http://schemas.microsoft.com/office/mac/drawingml/2011/main" val="0"/>
+              <ma14:wrappingTextBoxFlag xmlns:ma14="http://schemas.microsoft.com/office/mac/drawingml/2011/main" xmlns="" val="0"/>
             </a:ext>
           </a:extLst>
         </p:spPr>
@@ -14208,7 +14208,7 @@
           </a:prstGeom>
           <a:extLst>
             <a:ext uri="{C572A759-6A51-4108-AA02-DFA0A04FC94B}">
-              <ma14:wrappingTextBoxFlag xmlns="" xmlns:ma14="http://schemas.microsoft.com/office/mac/drawingml/2011/main" val="0"/>
+              <ma14:wrappingTextBoxFlag xmlns:ma14="http://schemas.microsoft.com/office/mac/drawingml/2011/main" xmlns="" val="0"/>
             </a:ext>
           </a:extLst>
         </p:spPr>
@@ -14467,7 +14467,7 @@
           </a:prstGeom>
           <a:extLst>
             <a:ext uri="{C572A759-6A51-4108-AA02-DFA0A04FC94B}">
-              <ma14:wrappingTextBoxFlag xmlns="" xmlns:ma14="http://schemas.microsoft.com/office/mac/drawingml/2011/main" val="0"/>
+              <ma14:wrappingTextBoxFlag xmlns:ma14="http://schemas.microsoft.com/office/mac/drawingml/2011/main" xmlns="" val="0"/>
             </a:ext>
           </a:extLst>
         </p:spPr>
@@ -15078,7 +15078,7 @@
           </a:prstGeom>
           <a:extLst>
             <a:ext uri="{C572A759-6A51-4108-AA02-DFA0A04FC94B}">
-              <ma14:wrappingTextBoxFlag xmlns="" xmlns:ma14="http://schemas.microsoft.com/office/mac/drawingml/2011/main" val="0"/>
+              <ma14:wrappingTextBoxFlag xmlns:ma14="http://schemas.microsoft.com/office/mac/drawingml/2011/main" xmlns="" val="0"/>
             </a:ext>
           </a:extLst>
         </p:spPr>
@@ -15390,7 +15390,7 @@
           </a:prstGeom>
           <a:extLst>
             <a:ext uri="{C572A759-6A51-4108-AA02-DFA0A04FC94B}">
-              <ma14:wrappingTextBoxFlag xmlns="" xmlns:ma14="http://schemas.microsoft.com/office/mac/drawingml/2011/main" val="0"/>
+              <ma14:wrappingTextBoxFlag xmlns:ma14="http://schemas.microsoft.com/office/mac/drawingml/2011/main" xmlns="" val="0"/>
             </a:ext>
           </a:extLst>
         </p:spPr>
@@ -16902,7 +16902,7 @@
           </a:prstGeom>
           <a:extLst>
             <a:ext uri="{C572A759-6A51-4108-AA02-DFA0A04FC94B}">
-              <ma14:wrappingTextBoxFlag xmlns="" xmlns:ma14="http://schemas.microsoft.com/office/mac/drawingml/2011/main" val="0"/>
+              <ma14:wrappingTextBoxFlag xmlns:ma14="http://schemas.microsoft.com/office/mac/drawingml/2011/main" xmlns="" val="0"/>
             </a:ext>
           </a:extLst>
         </p:spPr>
